--- a/companies/northgate-staffing/Engagements/Roach, Moss and Hall/2015.09.20 - Briefing Deck - Roach, Moss and Hall.pptx
+++ b/companies/northgate-staffing/Engagements/Roach, Moss and Hall/2015.09.20 - Briefing Deck - Roach, Moss and Hall.pptx
@@ -10,7 +10,6 @@
     <p:sldId id="258" r:id="rId9"/>
     <p:sldId id="259" r:id="rId10"/>
     <p:sldId id="260" r:id="rId11"/>
-    <p:sldId id="261" r:id="rId12"/>
   </p:sldIdLst>
   <p:sldSz cx="9144000" cy="6858000" type="screen4x3"/>
   <p:notesSz cx="6858000" cy="9144000"/>
@@ -3114,7 +3113,7 @@
                   <a:srgbClr val="1E4D2B"/>
                 </a:solidFill>
               </a:rPr>
-              <a:t>Chief Financial Officer Search: Roach, Moss and Hall</a:t>
+              <a:t>CFO Search: Roach, Moss and Hall</a:t>
             </a:r>
           </a:p>
         </p:txBody>
@@ -3139,27 +3138,9 @@
             </a:r>
           </a:p>
           <a:p>
-            <a:pPr lvl="1"/>
-            <a:r>
-              <a:t>Client briefing prepared for Jason Myers, Chief Operating Officer</a:t>
-            </a:r>
-          </a:p>
-          <a:p>
-            <a:pPr lvl="1"/>
-            <a:r>
-              <a:t>Search team: Sandra Fuentes, Principal; Jeffrey Patterson, Research Consultant; James Grant, Senior Consultant</a:t>
-            </a:r>
-          </a:p>
-          <a:p>
-            <a:pPr lvl="1"/>
-            <a:r>
-              <a:t>Retained assignment, commenced August 27, 2015</a:t>
-            </a:r>
-          </a:p>
-          <a:p>
-            <a:pPr lvl="1"/>
-            <a:r>
-              <a:t>Confidential to Roach, Moss and Hall. Not for distribution beyond the interview panel.</a:t>
+            <a:pPr/>
+            <a:r>
+              <a:t>A retained search for the next Chief Financial Officer of Roach, Moss and Hall, prepared for the hiring committee by our search team.</a:t>
             </a:r>
           </a:p>
         </p:txBody>
@@ -3203,7 +3184,7 @@
                   <a:srgbClr val="1E4D2B"/>
                 </a:solidFill>
               </a:rPr>
-              <a:t>Where the Search Stands</a:t>
+              <a:t>What we set out to do</a:t>
             </a:r>
           </a:p>
         </p:txBody>
@@ -3225,25 +3206,19 @@
           <a:p>
             <a:pPr lvl="1"/>
             <a:r>
-              <a:t>Position specification agreed and signed. It has not moved since sign-off and will not without your written agreement.</a:t>
+              <a:t>Find a Chief Financial Officer who can carry the finance function through the company's next stage of growth, not simply keep its books.</a:t>
             </a:r>
           </a:p>
           <a:p>
             <a:pPr lvl="1"/>
             <a:r>
-              <a:t>Market map complete in first pass: the identifiable universe in your sectors and geography, sized and segmented.</a:t>
+              <a:t>Run the search on a retained basis, working only for Roach, Moss and Hall on this mandate until the seat is filled.</a:t>
             </a:r>
           </a:p>
           <a:p>
             <a:pPr lvl="1"/>
             <a:r>
-              <a:t>Approach calls under way against the signed specification.</a:t>
-            </a:r>
-          </a:p>
-          <a:p>
-            <a:pPr lvl="1"/>
-            <a:r>
-              <a:t>It is too early to characterize a slate, and we will not characterize one before we can defend it.</a:t>
+              <a:t>Protect discretion throughout, describing candidates by their current role and record rather than by name until both sides are ready to meet.</a:t>
             </a:r>
           </a:p>
         </p:txBody>
@@ -3287,7 +3262,7 @@
                   <a:srgbClr val="1E4D2B"/>
                 </a:solidFill>
               </a:rPr>
-              <a:t>The Market As We Find It</a:t>
+              <a:t>Where the search stands today</a:t>
             </a:r>
           </a:p>
         </p:txBody>
@@ -3309,25 +3284,19 @@
           <a:p>
             <a:pPr lvl="1"/>
             <a:r>
-              <a:t>The universe that survives the specification is smaller than sector headcount suggests. This is a market of dozens, not hundreds.</a:t>
+              <a:t>The engagement opened on August 27, 2015, and the position specification has been agreed with Jason Myers and the board, so the whole team is now searching against one settled brief.</a:t>
             </a:r>
           </a:p>
           <a:p>
             <a:pPr lvl="1"/>
             <a:r>
-              <a:t>Roughly half sit inside firms of your scale or one tier larger. The rest are divisional finance leaders who would be taking a first full officer's seat.</a:t>
+              <a:t>James Grant has begun mapping the market at the senior-operator level, covering the sectors where a CFO of this profile is likely to be found, and is building the long list from that map.</a:t>
             </a:r>
           </a:p>
           <a:p>
             <a:pPr lvl="1"/>
             <a:r>
-              <a:t>Compensation has moved since the role was last filled. We will bring you evidence rather than impressions.</a:t>
-            </a:r>
-          </a:p>
-          <a:p>
-            <a:pPr lvl="1"/>
-            <a:r>
-              <a:t>The scarce trait is not technical accounting. It is the operator who closes fast and can then say what the close means.</a:t>
+              <a:t>Jeffrey Patterson has opened the first candidate conversations and is keeping every thread moving, so that no promising prospect goes quiet while the field is still coming together.</a:t>
             </a:r>
           </a:p>
         </p:txBody>
@@ -3371,7 +3340,7 @@
                   <a:srgbClr val="1E4D2B"/>
                 </a:solidFill>
               </a:rPr>
-              <a:t>How Candidates Are Approached</a:t>
+              <a:t>Who is on your account</a:t>
             </a:r>
           </a:p>
         </p:txBody>
@@ -3393,25 +3362,19 @@
           <a:p>
             <a:pPr lvl="1"/>
             <a:r>
-              <a:t>Every approach is direct and in confidence, made by James Grant or by Jeffrey Patterson. No advertisement, no posting, no third party.</a:t>
+              <a:t>Sandra Fuentes, Principal, leads the assignment and owns the relationship with the committee and with every candidate.</a:t>
             </a:r>
           </a:p>
           <a:p>
             <a:pPr lvl="1"/>
             <a:r>
-              <a:t>Candidates hear the sector, the scale, and the shape of the role before they hear the name of the company.</a:t>
+              <a:t>James Grant, Senior Consultant, works the market at the most senior level and weighs the finalists.</a:t>
             </a:r>
           </a:p>
           <a:p>
             <a:pPr lvl="1"/>
             <a:r>
-              <a:t>In everything that circulates, including this document, candidates are their current seat and market rather than their name.</a:t>
-            </a:r>
-          </a:p>
-          <a:p>
-            <a:pPr lvl="1"/>
-            <a:r>
-              <a:t>Discretion runs both ways: your search is not discussed with a candidate's colleagues, and a candidate's interest never reaches their employer.</a:t>
+              <a:t>Jeffrey Patterson, Research Consultant, runs the candidate threads and keeps the search on schedule.</a:t>
             </a:r>
           </a:p>
         </p:txBody>
@@ -3455,7 +3418,7 @@
                   <a:srgbClr val="1E4D2B"/>
                 </a:solidFill>
               </a:rPr>
-              <a:t>What We Need From You</a:t>
+              <a:t>What happens next</a:t>
             </a:r>
           </a:p>
         </p:txBody>
@@ -3477,103 +3440,19 @@
           <a:p>
             <a:pPr lvl="1"/>
             <a:r>
-              <a:t>Confirm the interview panel and hold provisional dates now. Calendars, not candidates, are what usually costs a search its best person.</a:t>
+              <a:t>Complete the market map and close the long list over the coming weeks.</a:t>
             </a:r>
           </a:p>
           <a:p>
             <a:pPr lvl="1"/>
             <a:r>
-              <a:t>A decision in principle on relocation support, ahead of the slate. Two of the strongest segments of this market sit outside your metropolitan area.</a:t>
+              <a:t>Begin first-round interviews and assessment as strong prospects confirm their interest.</a:t>
             </a:r>
           </a:p>
           <a:p>
             <a:pPr lvl="1"/>
             <a:r>
-              <a:t>Jason Myers to remain the single decision voice to us. Where the panel disagrees, we would rather hear it resolved than averaged.</a:t>
-            </a:r>
-          </a:p>
-        </p:txBody>
-      </p:sp>
-    </p:spTree>
-  </p:cSld>
-  <p:clrMapOvr>
-    <a:masterClrMapping/>
-  </p:clrMapOvr>
-</p:sld>
-</file>
-
-<file path=ppt/slides/slide6.xml><?xml version="1.0" encoding="utf-8"?>
-<p:sld xmlns:a="http://schemas.openxmlformats.org/drawingml/2006/main" xmlns:p="http://schemas.openxmlformats.org/presentationml/2006/main" xmlns:r="http://schemas.openxmlformats.org/officeDocument/2006/relationships">
-  <p:cSld>
-    <p:spTree>
-      <p:nvGrpSpPr>
-        <p:cNvPr id="1" name=""/>
-        <p:cNvGrpSpPr/>
-        <p:nvPr/>
-      </p:nvGrpSpPr>
-      <p:grpSpPr/>
-      <p:sp>
-        <p:nvSpPr>
-          <p:cNvPr id="2" name="Title 1"/>
-          <p:cNvSpPr>
-            <a:spLocks noGrp="1"/>
-          </p:cNvSpPr>
-          <p:nvPr>
-            <p:ph type="title"/>
-          </p:nvPr>
-        </p:nvSpPr>
-        <p:spPr/>
-        <p:txBody>
-          <a:bodyPr/>
-          <a:lstStyle/>
-          <a:p>
-            <a:r>
-              <a:rPr>
-                <a:solidFill>
-                  <a:srgbClr val="1E4D2B"/>
-                </a:solidFill>
-              </a:rPr>
-              <a:t>Next Steps</a:t>
-            </a:r>
-          </a:p>
-        </p:txBody>
-      </p:sp>
-      <p:sp>
-        <p:nvSpPr>
-          <p:cNvPr id="3" name="Content Placeholder 2"/>
-          <p:cNvSpPr>
-            <a:spLocks noGrp="1"/>
-          </p:cNvSpPr>
-          <p:nvPr>
-            <p:ph idx="1"/>
-          </p:nvPr>
-        </p:nvSpPr>
-        <p:spPr/>
-        <p:txBody>
-          <a:bodyPr/>
-          <a:lstStyle/>
-          <a:p>
-            <a:pPr lvl="1"/>
-            <a:r>
-              <a:t>Approach calls continue against the agreed specification through the coming weeks.</a:t>
-            </a:r>
-          </a:p>
-          <a:p>
-            <a:pPr lvl="1"/>
-            <a:r>
-              <a:t>Longlist review, by seat and market, before any candidate is presented to you.</a:t>
-            </a:r>
-          </a:p>
-          <a:p>
-            <a:pPr lvl="1"/>
-            <a:r>
-              <a:t>Slate presentation to follow the longlist review, on a date set with your office.</a:t>
-            </a:r>
-          </a:p>
-          <a:p>
-            <a:pPr lvl="1"/>
-            <a:r>
-              <a:t>Sandra Fuentes remains your point of contact for anything of substance in the interim.</a:t>
+              <a:t>Report progress to Jason Myers at our standing check-in, and bring the committee a short slate once the field has been tested.</a:t>
             </a:r>
           </a:p>
         </p:txBody>

--- a/companies/northgate-staffing/Engagements/Roach, Moss and Hall/2015.09.20 - Briefing Deck - Roach, Moss and Hall.pptx
+++ b/companies/northgate-staffing/Engagements/Roach, Moss and Hall/2015.09.20 - Briefing Deck - Roach, Moss and Hall.pptx
@@ -3113,7 +3113,7 @@
                   <a:srgbClr val="1E4D2B"/>
                 </a:solidFill>
               </a:rPr>
-              <a:t>CFO Search: Roach, Moss and Hall</a:t>
+              <a:t>CFO Search for Roach, Moss and Hall</a:t>
             </a:r>
           </a:p>
         </p:txBody>
@@ -3140,7 +3140,7 @@
           <a:p>
             <a:pPr/>
             <a:r>
-              <a:t>A retained search for the next Chief Financial Officer of Roach, Moss and Hall, prepared for the hiring committee by our search team.</a:t>
+              <a:t>A briefing for Jason Myers and the interview group, prepared by Sandra Fuentes, with Jeffrey Patterson on research and James Grant on process. The engagement began August 27, 2015 and is scoped to run about three months. This briefing covers the opening phase of the work: what we have done, what the market has said back to us so far, and what we would ask of you before the slate is drawn.</a:t>
             </a:r>
           </a:p>
         </p:txBody>
@@ -3184,7 +3184,7 @@
                   <a:srgbClr val="1E4D2B"/>
                 </a:solidFill>
               </a:rPr>
-              <a:t>What we set out to do</a:t>
+              <a:t>Where the search stands</a:t>
             </a:r>
           </a:p>
         </p:txBody>
@@ -3206,19 +3206,25 @@
           <a:p>
             <a:pPr lvl="1"/>
             <a:r>
-              <a:t>Find a Chief Financial Officer who can carry the finance function through the company's next stage of growth, not simply keep its books.</a:t>
+              <a:t>The position specification is settled and signed off, and every approach we have made since has been made against it.</a:t>
             </a:r>
           </a:p>
           <a:p>
             <a:pPr lvl="1"/>
             <a:r>
-              <a:t>Run the search on a retained basis, working only for Roach, Moss and Hall on this mandate until the seat is filled.</a:t>
+              <a:t>The company map is agreed, covering the sector itself and the two adjacent ones, with the reason each company is on it recorded.</a:t>
             </a:r>
           </a:p>
           <a:p>
             <a:pPr lvl="1"/>
             <a:r>
-              <a:t>Protect discretion throughout, describing candidates by their current role and record rather than by name until both sides are ready to meet.</a:t>
+              <a:t>Approaches are underway. These are conversations rather than applications; almost nobody we want is looking.</a:t>
+            </a:r>
+          </a:p>
+          <a:p>
+            <a:pPr lvl="1"/>
+            <a:r>
+              <a:t>There is no slate yet, and there should not be. A slate drawn at this point would be a list of the people who answered first.</a:t>
             </a:r>
           </a:p>
         </p:txBody>
@@ -3262,7 +3268,7 @@
                   <a:srgbClr val="1E4D2B"/>
                 </a:solidFill>
               </a:rPr>
-              <a:t>Where the search stands today</a:t>
+              <a:t>What the market is telling us</a:t>
             </a:r>
           </a:p>
         </p:txBody>
@@ -3284,19 +3290,25 @@
           <a:p>
             <a:pPr lvl="1"/>
             <a:r>
-              <a:t>The engagement opened on August 27, 2015, and the position specification has been agreed with Jason Myers and the board, so the whole team is now searching against one settled brief.</a:t>
+              <a:t>The role reads well to operators who have been through a growth stretch, and reads as a step sideways to sitting finance chiefs at much larger companies.</a:t>
             </a:r>
           </a:p>
           <a:p>
             <a:pPr lvl="1"/>
             <a:r>
-              <a:t>James Grant has begun mapping the market at the senior-operator level, covering the sectors where a CFO of this profile is likely to be found, and is building the long list from that map.</a:t>
+              <a:t>The board exposure written into the specification is the part that draws people in.</a:t>
             </a:r>
           </a:p>
           <a:p>
             <a:pPr lvl="1"/>
             <a:r>
-              <a:t>Jeffrey Patterson has opened the first candidate conversations and is keeping every thread moving, so that no promising prospect goes quiet while the field is still coming together.</a:t>
+              <a:t>Two candidates asked early how decisions actually get made and who owns the annual plan. Expect that question in your interviews.</a:t>
+            </a:r>
+          </a:p>
+          <a:p>
+            <a:pPr lvl="1"/>
+            <a:r>
+              <a:t>Compensation is not an obstacle so far, though we will know more once we are talking with people who would have to leave something behind.</a:t>
             </a:r>
           </a:p>
         </p:txBody>
@@ -3340,7 +3352,7 @@
                   <a:srgbClr val="1E4D2B"/>
                 </a:solidFill>
               </a:rPr>
-              <a:t>Who is on your account</a:t>
+              <a:t>How we are protecting the process</a:t>
             </a:r>
           </a:p>
         </p:txBody>
@@ -3362,19 +3374,25 @@
           <a:p>
             <a:pPr lvl="1"/>
             <a:r>
-              <a:t>Sandra Fuentes, Principal, leads the assignment and owns the relationship with the committee and with every candidate.</a:t>
+              <a:t>Candidates are described by their current role and never by name in anything that circulates, including these pages.</a:t>
             </a:r>
           </a:p>
           <a:p>
             <a:pPr lvl="1"/>
             <a:r>
-              <a:t>James Grant, Senior Consultant, works the market at the most senior level and weighs the finalists.</a:t>
+              <a:t>Jeffrey Patterson holds the target list and the reasoning behind each name, so that any candidate who reaches you can be defended.</a:t>
             </a:r>
           </a:p>
           <a:p>
             <a:pPr lvl="1"/>
             <a:r>
-              <a:t>Jeffrey Patterson, Research Consultant, runs the candidate threads and keeps the search on schedule.</a:t>
+              <a:t>James Grant holds the interview calendar. Windows are confirmed before a candidate is told anything about dates.</a:t>
+            </a:r>
+          </a:p>
+          <a:p>
+            <a:pPr lvl="1"/>
+            <a:r>
+              <a:t>Nothing about this search is put in writing outside the engagement team and your interview group.</a:t>
             </a:r>
           </a:p>
         </p:txBody>
@@ -3418,7 +3436,7 @@
                   <a:srgbClr val="1E4D2B"/>
                 </a:solidFill>
               </a:rPr>
-              <a:t>What happens next</a:t>
+              <a:t>What we would ask of you</a:t>
             </a:r>
           </a:p>
         </p:txBody>
@@ -3440,19 +3458,19 @@
           <a:p>
             <a:pPr lvl="1"/>
             <a:r>
-              <a:t>Complete the market map and close the long list over the coming weeks.</a:t>
+              <a:t>Two half-day windows held for the interview group, so that the slate review is not waiting on calendars once it is ready.</a:t>
             </a:r>
           </a:p>
           <a:p>
             <a:pPr lvl="1"/>
             <a:r>
-              <a:t>Begin first-round interviews and assessment as strong prospects confirm their interest.</a:t>
+              <a:t>A view from Jason Myers on whether the board members meet finalists together or separately.</a:t>
             </a:r>
           </a:p>
           <a:p>
             <a:pPr lvl="1"/>
             <a:r>
-              <a:t>Report progress to Jason Myers at our standing check-in, and bring the committee a short slate once the field has been tested.</a:t>
+              <a:t>Feedback within a day of each meeting. Candidates read a long silence as a decision that has already been made.</a:t>
             </a:r>
           </a:p>
         </p:txBody>
